--- a/packages/presentation/qa/sample-report.zh-CN.pptx
+++ b/packages/presentation/qa/sample-report.zh-CN.pptx
@@ -4383,7 +4383,7 @@
       </p:sp>
       <p:pic>
         <p:nvPicPr>
-          <p:cNvPr id="4" name="Picture 3" descr="tmps6dq_tqa.png"/>
+          <p:cNvPr id="4" name="Picture 3" descr="tmp4il21kyb.png"/>
           <p:cNvPicPr>
             <a:picLocks noChangeAspect="1"/>
           </p:cNvPicPr>
@@ -4615,7 +4615,7 @@
       </p:sp>
       <p:pic>
         <p:nvPicPr>
-          <p:cNvPr id="4" name="Picture 3" descr="tmphzfi4c2q.png"/>
+          <p:cNvPr id="4" name="Picture 3" descr="tmp2okzi3ao.png"/>
           <p:cNvPicPr>
             <a:picLocks noChangeAspect="1"/>
           </p:cNvPicPr>
@@ -4918,7 +4918,7 @@
       </p:sp>
       <p:pic>
         <p:nvPicPr>
-          <p:cNvPr id="4" name="Picture 3" descr="tmphzfi4c2q.png"/>
+          <p:cNvPr id="4" name="Picture 3" descr="tmp2okzi3ao.png"/>
           <p:cNvPicPr>
             <a:picLocks noChangeAspect="1"/>
           </p:cNvPicPr>
@@ -5620,7 +5620,7 @@
       </p:sp>
       <p:pic>
         <p:nvPicPr>
-          <p:cNvPr id="4" name="Picture 3" descr="tmphzfi4c2q.png"/>
+          <p:cNvPr id="4" name="Picture 3" descr="tmp2okzi3ao.png"/>
           <p:cNvPicPr>
             <a:picLocks noChangeAspect="1"/>
           </p:cNvPicPr>
@@ -5974,7 +5974,7 @@
       </p:sp>
       <p:pic>
         <p:nvPicPr>
-          <p:cNvPr id="4" name="Picture 3" descr="tmphzfi4c2q.png"/>
+          <p:cNvPr id="4" name="Picture 3" descr="tmp2okzi3ao.png"/>
           <p:cNvPicPr>
             <a:picLocks noChangeAspect="1"/>
           </p:cNvPicPr>
@@ -7046,7 +7046,7 @@
       </p:sp>
       <p:pic>
         <p:nvPicPr>
-          <p:cNvPr id="4" name="Picture 3" descr="tmphzfi4c2q.png"/>
+          <p:cNvPr id="4" name="Picture 3" descr="tmp2okzi3ao.png"/>
           <p:cNvPicPr>
             <a:picLocks noChangeAspect="1"/>
           </p:cNvPicPr>
@@ -8068,7 +8068,7 @@
       </p:sp>
       <p:pic>
         <p:nvPicPr>
-          <p:cNvPr id="4" name="Picture 3" descr="tmphzfi4c2q.png"/>
+          <p:cNvPr id="4" name="Picture 3" descr="tmp2okzi3ao.png"/>
           <p:cNvPicPr>
             <a:picLocks noChangeAspect="1"/>
           </p:cNvPicPr>
@@ -8700,7 +8700,7 @@
       </p:sp>
       <p:pic>
         <p:nvPicPr>
-          <p:cNvPr id="4" name="Picture 3" descr="tmphzfi4c2q.png"/>
+          <p:cNvPr id="4" name="Picture 3" descr="tmp2okzi3ao.png"/>
           <p:cNvPicPr>
             <a:picLocks noChangeAspect="1"/>
           </p:cNvPicPr>
@@ -9305,7 +9305,7 @@
       </p:sp>
       <p:pic>
         <p:nvPicPr>
-          <p:cNvPr id="4" name="Picture 3" descr="tmphzfi4c2q.png"/>
+          <p:cNvPr id="4" name="Picture 3" descr="tmp2okzi3ao.png"/>
           <p:cNvPicPr>
             <a:picLocks noChangeAspect="1"/>
           </p:cNvPicPr>
@@ -10061,7 +10061,7 @@
       </p:sp>
       <p:pic>
         <p:nvPicPr>
-          <p:cNvPr id="4" name="Picture 3" descr="tmphzfi4c2q.png"/>
+          <p:cNvPr id="4" name="Picture 3" descr="tmp2okzi3ao.png"/>
           <p:cNvPicPr>
             <a:picLocks noChangeAspect="1"/>
           </p:cNvPicPr>
@@ -10542,7 +10542,7 @@
       </p:sp>
       <p:pic>
         <p:nvPicPr>
-          <p:cNvPr id="4" name="Picture 3" descr="tmphzfi4c2q.png"/>
+          <p:cNvPr id="4" name="Picture 3" descr="tmp2okzi3ao.png"/>
           <p:cNvPicPr>
             <a:picLocks noChangeAspect="1"/>
           </p:cNvPicPr>
@@ -10845,7 +10845,7 @@
       </p:sp>
       <p:pic>
         <p:nvPicPr>
-          <p:cNvPr id="4" name="Picture 3" descr="tmphzfi4c2q.png"/>
+          <p:cNvPr id="4" name="Picture 3" descr="tmp2okzi3ao.png"/>
           <p:cNvPicPr>
             <a:picLocks noChangeAspect="1"/>
           </p:cNvPicPr>
@@ -11402,7 +11402,7 @@
       </p:sp>
       <p:pic>
         <p:nvPicPr>
-          <p:cNvPr id="4" name="Picture 3" descr="tmphzfi4c2q.png"/>
+          <p:cNvPr id="4" name="Picture 3" descr="tmp2okzi3ao.png"/>
           <p:cNvPicPr>
             <a:picLocks noChangeAspect="1"/>
           </p:cNvPicPr>
@@ -12272,7 +12272,7 @@
       </p:sp>
       <p:pic>
         <p:nvPicPr>
-          <p:cNvPr id="4" name="Picture 3" descr="tmphzfi4c2q.png"/>
+          <p:cNvPr id="4" name="Picture 3" descr="tmp2okzi3ao.png"/>
           <p:cNvPicPr>
             <a:picLocks noChangeAspect="1"/>
           </p:cNvPicPr>
